--- a/spring/sem_2_iterators/presentations/sem_2_iterators.pptx
+++ b/spring/sem_2_iterators/presentations/sem_2_iterators.pptx
@@ -267,7 +267,7 @@
             </a:pPr>
             <a:fld id="{BCC18F51-09EC-435C-A3BA-64A766E099C0}" type="datetimeFigureOut">
               <a:rPr lang="ru-RU"/>
-              <a:t>18.02.2025</a:t>
+              <a:t>22.02.2025</a:t>
             </a:fld>
             <a:endParaRPr lang="ru-RU"/>
           </a:p>
@@ -456,7 +456,7 @@
             </a:pPr>
             <a:fld id="{BCC18F51-09EC-435C-A3BA-64A766E099C0}" type="datetimeFigureOut">
               <a:rPr lang="ru-RU"/>
-              <a:t>18.02.2025</a:t>
+              <a:t>22.02.2025</a:t>
             </a:fld>
             <a:endParaRPr lang="ru-RU"/>
           </a:p>
@@ -655,7 +655,7 @@
             </a:pPr>
             <a:fld id="{BCC18F51-09EC-435C-A3BA-64A766E099C0}" type="datetimeFigureOut">
               <a:rPr lang="ru-RU"/>
-              <a:t>18.02.2025</a:t>
+              <a:t>22.02.2025</a:t>
             </a:fld>
             <a:endParaRPr lang="ru-RU"/>
           </a:p>
@@ -844,7 +844,7 @@
             </a:pPr>
             <a:fld id="{BCC18F51-09EC-435C-A3BA-64A766E099C0}" type="datetimeFigureOut">
               <a:rPr lang="ru-RU"/>
-              <a:t>18.02.2025</a:t>
+              <a:t>22.02.2025</a:t>
             </a:fld>
             <a:endParaRPr lang="ru-RU"/>
           </a:p>
@@ -1099,7 +1099,7 @@
             </a:pPr>
             <a:fld id="{BCC18F51-09EC-435C-A3BA-64A766E099C0}" type="datetimeFigureOut">
               <a:rPr lang="ru-RU"/>
-              <a:t>18.02.2025</a:t>
+              <a:t>22.02.2025</a:t>
             </a:fld>
             <a:endParaRPr lang="ru-RU"/>
           </a:p>
@@ -1363,7 +1363,7 @@
             </a:pPr>
             <a:fld id="{BCC18F51-09EC-435C-A3BA-64A766E099C0}" type="datetimeFigureOut">
               <a:rPr lang="ru-RU"/>
-              <a:t>18.02.2025</a:t>
+              <a:t>22.02.2025</a:t>
             </a:fld>
             <a:endParaRPr lang="ru-RU"/>
           </a:p>
@@ -1768,7 +1768,7 @@
             </a:pPr>
             <a:fld id="{BCC18F51-09EC-435C-A3BA-64A766E099C0}" type="datetimeFigureOut">
               <a:rPr lang="ru-RU"/>
-              <a:t>18.02.2025</a:t>
+              <a:t>22.02.2025</a:t>
             </a:fld>
             <a:endParaRPr lang="ru-RU"/>
           </a:p>
@@ -1892,7 +1892,7 @@
             </a:pPr>
             <a:fld id="{BCC18F51-09EC-435C-A3BA-64A766E099C0}" type="datetimeFigureOut">
               <a:rPr lang="ru-RU"/>
-              <a:t>18.02.2025</a:t>
+              <a:t>22.02.2025</a:t>
             </a:fld>
             <a:endParaRPr lang="ru-RU"/>
           </a:p>
@@ -1991,7 +1991,7 @@
             </a:pPr>
             <a:fld id="{BCC18F51-09EC-435C-A3BA-64A766E099C0}" type="datetimeFigureOut">
               <a:rPr lang="ru-RU"/>
-              <a:t>18.02.2025</a:t>
+              <a:t>22.02.2025</a:t>
             </a:fld>
             <a:endParaRPr lang="ru-RU"/>
           </a:p>
@@ -2290,7 +2290,7 @@
             </a:pPr>
             <a:fld id="{BCC18F51-09EC-435C-A3BA-64A766E099C0}" type="datetimeFigureOut">
               <a:rPr lang="ru-RU"/>
-              <a:t>18.02.2025</a:t>
+              <a:t>22.02.2025</a:t>
             </a:fld>
             <a:endParaRPr lang="ru-RU"/>
           </a:p>
@@ -2558,7 +2558,7 @@
             </a:pPr>
             <a:fld id="{BCC18F51-09EC-435C-A3BA-64A766E099C0}" type="datetimeFigureOut">
               <a:rPr lang="ru-RU"/>
-              <a:t>18.02.2025</a:t>
+              <a:t>22.02.2025</a:t>
             </a:fld>
             <a:endParaRPr lang="ru-RU"/>
           </a:p>
@@ -2790,7 +2790,7 @@
             </a:pPr>
             <a:fld id="{BCC18F51-09EC-435C-A3BA-64A766E099C0}" type="datetimeFigureOut">
               <a:rPr lang="ru-RU"/>
-              <a:t>18.02.2025</a:t>
+              <a:t>22.02.2025</a:t>
             </a:fld>
             <a:endParaRPr lang="ru-RU"/>
           </a:p>
@@ -3471,30 +3471,22 @@
               <a:defRPr/>
             </a:pPr>
             <a:r>
-              <a:t>Требования к видам итераторов</a:t>
-            </a:r>
-          </a:p>
-        </p:txBody>
-      </p:sp>
-      <p:sp>
-        <p:nvSpPr>
-          <p:cNvPr id="138695936" name="Объект 2"/>
-          <p:cNvSpPr>
-            <a:spLocks noGrp="1"/>
-          </p:cNvSpPr>
-          <p:nvPr>
-            <p:ph idx="1"/>
-          </p:nvPr>
-        </p:nvSpPr>
-        <p:spPr bwMode="auto"/>
-        <p:txBody>
-          <a:bodyPr/>
-          <a:lstStyle/>
-          <a:p>
-            <a:pPr>
-              <a:defRPr/>
-            </a:pPr>
-            <a:endParaRPr/>
+              <a:rPr dirty="0" err="1"/>
+              <a:t>Требования</a:t>
+            </a:r>
+            <a:r>
+              <a:rPr dirty="0"/>
+              <a:t> к </a:t>
+            </a:r>
+            <a:r>
+              <a:rPr lang="ru-RU" dirty="0"/>
+              <a:t>категориям </a:t>
+            </a:r>
+            <a:r>
+              <a:rPr dirty="0" err="1"/>
+              <a:t>итераторов</a:t>
+            </a:r>
+            <a:endParaRPr dirty="0"/>
           </a:p>
         </p:txBody>
       </p:sp>
